--- a/examples/overview/src/ppt_md_merger_overview.pptx
+++ b/examples/overview/src/ppt_md_merger_overview.pptx
@@ -255,7 +255,7 @@
           <a:p>
             <a:fld id="{294670BC-B8C6-44A7-84E1-23632D8FD86F}" type="datetimeFigureOut">
               <a:rPr kumimoji="1" lang="ja-JP" altLang="en-US" smtClean="0"/>
-              <a:t>2026/6/4</a:t>
+              <a:t>2026/6/5</a:t>
             </a:fld>
             <a:endParaRPr kumimoji="1" lang="ja-JP" altLang="en-US"/>
           </a:p>
@@ -892,7 +892,7 @@
             </a:r>
             <a:r>
               <a:rPr lang="en-US" altLang="ja-JP"/>
-              <a:t>](docs/md_merge_spec.md)</a:t>
+              <a:t>](/docs/md_merge_spec.md)</a:t>
             </a:r>
             <a:r>
               <a:rPr lang="ja-JP" altLang="en-US"/>
